--- a/dist/초5/수학/분수의성질/초5_수학_분수의성질_02_약분과기약분수.pptx
+++ b/dist/초5/수학/분수의성질/초5_수학_분수의성질_02_약분과기약분수.pptx
@@ -120,13 +120,13 @@
   <p:extLst>
     <p:ext uri="{521415D9-36F7-43E2-AB2F-B90AF26B5E84}">
       <p14:sectionLst xmlns:p14="http://schemas.microsoft.com/office/powerpoint/2010/main">
-        <p14:section name="도입" id="{047dd845-dd62-2cd7-8934-5060f1cab0f0}">
+        <p14:section name="도입" id="{959f97dd-0402-dccf-efcd-47883eb8dadc}">
           <p14:sldIdLst>
             <p14:sldId id="256"/>
             <p14:sldId id="257"/>
           </p14:sldIdLst>
         </p14:section>
-        <p14:section name="개념" id="{821d452b-8d4b-a33c-49ad-f93c2e7b48e8}">
+        <p14:section name="개념" id="{74a4352a-72ce-86d2-0cb5-6e7540c614c4}">
           <p14:sldIdLst>
             <p14:sldId id="258"/>
             <p14:sldId id="259"/>
@@ -134,32 +134,32 @@
             <p14:sldId id="262"/>
           </p14:sldIdLst>
         </p14:section>
-        <p14:section name="연습" id="{bc96386d-1218-3e7d-235d-963e70ae346a}">
+        <p14:section name="연습" id="{bd888441-6148-d2f6-2347-e397a9d87631}">
           <p14:sldIdLst>
             <p14:sldId id="260"/>
             <p14:sldId id="263"/>
             <p14:sldId id="264"/>
           </p14:sldIdLst>
         </p14:section>
-        <p14:section name="개념" id="{c0d27f32-b132-c151-b7b6-e012c7db4262}">
+        <p14:section name="개념" id="{8a1851bf-aa8b-7826-0b71-597fe07d0dd1}">
           <p14:sldIdLst/>
         </p14:section>
-        <p14:section name="연습" id="{60e63de6-ddce-bacc-63cd-118dfba26f55}">
+        <p14:section name="연습" id="{3e2e7840-8f37-f9e4-84de-89a143bf30b4}">
           <p14:sldIdLst/>
         </p14:section>
-        <p14:section name="확인" id="{ef982ec7-2ad8-2492-9a6e-bc26b8d2a377}">
+        <p14:section name="확인" id="{65e38914-10c7-30b9-ab39-a144058c02ba}">
           <p14:sldIdLst>
             <p14:sldId id="265"/>
             <p14:sldId id="266"/>
             <p14:sldId id="267"/>
           </p14:sldIdLst>
         </p14:section>
-        <p14:section name="정리" id="{862b8170-af73-9840-e8ce-6f4aa92af01b}">
+        <p14:section name="정리" id="{d21d20cc-5556-346b-e8f8-dbf9083f7c11}">
           <p14:sldIdLst>
             <p14:sldId id="268"/>
           </p14:sldIdLst>
         </p14:section>
-        <p14:section name="보충" id="{98a9b901-7b68-1d9c-4a9d-cdfaf7512717}">
+        <p14:section name="보충" id="{1f302cd0-ac5b-7f43-8b14-cdec5b2d57a8}">
           <p14:sldIdLst>
             <p14:sldId id="269"/>
           </p14:sldIdLst>
@@ -1683,7 +1683,7 @@
 목적: 공약수로 여러 번 나누어도, 최대공약수로 한 번에 나누어도 같은 기약분수가 된다는 것을 비교합니다.
 시간: 약 4분
 이렇게 말해 보세요
-- “왼쪽은 2로 나누고, 또 2로 나누고, 3으로 나눴어. 12분의 18, 9분의 6에서 멈추면 안 되는 까닭은?”
+- “왼쪽은 2로 나누고, 또 2로 나누고, 3으로 나눴어. 18분의 12, 9분의 6에서 멈추면 안 되는 까닭은?”
 - “오른쪽은 24와 36의 최대공약수 12로 한 번에 나눴어. 답이 같아?”
 - “2 × 2 × 3은 얼마야?”
 예상 답
